--- a/docs/test0823/outputs/caseB_yangpyeong_250b/captures/yangpyeong_slide.pptx
+++ b/docs/test0823/outputs/caseB_yangpyeong_250b/captures/yangpyeong_slide.pptx
@@ -6266,7 +6266,7 @@
                 <a:ea typeface="Pretendard" pitchFamily="34" charset="-122"/>
                 <a:cs typeface="Pretendard" pitchFamily="34" charset="-120"/>
               </a:rPr>
-              <a:t>우량 메디컬/근생 테넌트 직영 만실 운영</a:t>
+              <a:t>물건 접면 도로 및 교통 여건은 현장 실사 확인 사항입니다</a:t>
             </a:r>
             <a:endParaRPr lang="en-US" sz="930" dirty="0"/>
           </a:p>
@@ -6287,7 +6287,7 @@
                 <a:ea typeface="Pretendard" pitchFamily="34" charset="-122"/>
                 <a:cs typeface="Pretendard" pitchFamily="34" charset="-120"/>
               </a:rPr>
-              <a:t>승강기 완비 및 자주식 주차 공간 확보</a:t>
+              <a:t>상세 임대차 계약 내역은 원본 계약서 대조가 필요합니다</a:t>
             </a:r>
             <a:endParaRPr lang="en-US" sz="930" dirty="0"/>
           </a:p>
@@ -6308,7 +6308,7 @@
                 <a:ea typeface="Pretendard" pitchFamily="34" charset="-122"/>
                 <a:cs typeface="Pretendard" pitchFamily="34" charset="-120"/>
               </a:rPr>
-              <a:t>공법상 잔여 용적률 활용 가치 상승 잠재력</a:t>
+              <a:t>건축물 제원 및 용도 현황은 첨부 건축물대장을 기준으로 합니다</a:t>
             </a:r>
             <a:endParaRPr lang="en-US" sz="930" dirty="0"/>
           </a:p>
@@ -7535,7 +7535,7 @@
                 <a:ea typeface="Pretendard" pitchFamily="34" charset="-122"/>
                 <a:cs typeface="Pretendard" pitchFamily="34" charset="-120"/>
               </a:rPr>
-              <a:t>현재 연 순수익률 (Cap Rate)</a:t>
+              <a:t>현재 연 순수익률 (Cap R</a:t>
             </a:r>
             <a:endParaRPr lang="en-US" sz="950" dirty="0"/>
           </a:p>
@@ -7572,11 +7572,11 @@
                 <a:solidFill>
                   <a:srgbClr val="0F172A"/>
                 </a:solidFill>
-                <a:latin typeface="Pretendard" pitchFamily="34" charset="0"/>
-                <a:ea typeface="Pretendard" pitchFamily="34" charset="-122"/>
-                <a:cs typeface="Pretendard" pitchFamily="34" charset="-120"/>
-              </a:rPr>
-              <a:t>2.41% (실투자금 기준 2.46%)</a:t>
+                <a:latin typeface="Arial" pitchFamily="34" charset="0"/>
+                <a:ea typeface="Arial" pitchFamily="34" charset="-122"/>
+                <a:cs typeface="Arial" pitchFamily="34" charset="-120"/>
+              </a:rPr>
+              <a:t>2.41%</a:t>
             </a:r>
             <a:endParaRPr lang="en-US" sz="2200" dirty="0"/>
           </a:p>
@@ -7680,130 +7680,7 @@
       </p:sp>
       <p:sp>
         <p:nvSpPr>
-          <p:cNvPr id="13" name="Shape 11"/>
-          <p:cNvSpPr/>
-          <p:nvPr/>
-        </p:nvSpPr>
-        <p:spPr>
-          <a:xfrm>
-            <a:off x="566928" y="3410712"/>
-            <a:ext cx="11057839" cy="1280160"/>
-          </a:xfrm>
-          <a:prstGeom prst="roundRect">
-            <a:avLst>
-              <a:gd name="adj" fmla="val 4286"/>
-            </a:avLst>
-          </a:prstGeom>
-          <a:solidFill>
-            <a:srgbClr val="DBEAFE"/>
-          </a:solidFill>
-          <a:ln/>
-        </p:spPr>
-      </p:sp>
-      <p:sp>
-        <p:nvSpPr>
-          <p:cNvPr id="14" name="Shape 12"/>
-          <p:cNvSpPr/>
-          <p:nvPr/>
-        </p:nvSpPr>
-        <p:spPr>
-          <a:xfrm>
-            <a:off x="566928" y="3465576"/>
-            <a:ext cx="36576" cy="1170432"/>
-          </a:xfrm>
-          <a:prstGeom prst="rect">
-            <a:avLst/>
-          </a:prstGeom>
-          <a:solidFill>
-            <a:srgbClr val="1D4ED8"/>
-          </a:solidFill>
-          <a:ln/>
-        </p:spPr>
-      </p:sp>
-      <p:sp>
-        <p:nvSpPr>
-          <p:cNvPr id="15" name="Text 13"/>
-          <p:cNvSpPr/>
-          <p:nvPr/>
-        </p:nvSpPr>
-        <p:spPr>
-          <a:xfrm>
-            <a:off x="749808" y="3520440"/>
-            <a:ext cx="10728655" cy="201168"/>
-          </a:xfrm>
-          <a:prstGeom prst="rect">
-            <a:avLst/>
-          </a:prstGeom>
-          <a:noFill/>
-          <a:ln/>
-        </p:spPr>
-        <p:txBody>
-          <a:bodyPr wrap="square" lIns="0" tIns="0" rIns="0" bIns="0" rtlCol="0" anchor="ctr"/>
-          <a:lstStyle/>
-          <a:p>
-            <a:pPr indent="0" marL="0">
-              <a:buNone/>
-            </a:pPr>
-            <a:r>
-              <a:rPr lang="en-US" sz="1050" b="1" dirty="0">
-                <a:solidFill>
-                  <a:srgbClr val="1D4ED8"/>
-                </a:solidFill>
-                <a:latin typeface="Pretendard" pitchFamily="34" charset="0"/>
-                <a:ea typeface="Pretendard" pitchFamily="34" charset="-122"/>
-                <a:cs typeface="Pretendard" pitchFamily="34" charset="-120"/>
-              </a:rPr>
-              <a:t>투자 가치 제안</a:t>
-            </a:r>
-            <a:endParaRPr lang="en-US" sz="1050" dirty="0"/>
-          </a:p>
-        </p:txBody>
-      </p:sp>
-      <p:sp>
-        <p:nvSpPr>
-          <p:cNvPr id="16" name="Text 14"/>
-          <p:cNvSpPr/>
-          <p:nvPr/>
-        </p:nvSpPr>
-        <p:spPr>
-          <a:xfrm>
-            <a:off x="749808" y="3739896"/>
-            <a:ext cx="10728655" cy="877824"/>
-          </a:xfrm>
-          <a:prstGeom prst="rect">
-            <a:avLst/>
-          </a:prstGeom>
-          <a:noFill/>
-          <a:ln/>
-        </p:spPr>
-        <p:txBody>
-          <a:bodyPr wrap="square" lIns="0" tIns="0" rIns="0" bIns="0" rtlCol="0" anchor="t"/>
-          <a:lstStyle/>
-          <a:p>
-            <a:pPr indent="0" marL="0">
-              <a:lnSpc>
-                <a:spcPct val="120000"/>
-              </a:lnSpc>
-              <a:buNone/>
-            </a:pPr>
-            <a:r>
-              <a:rPr lang="en-US" sz="930" dirty="0">
-                <a:solidFill>
-                  <a:srgbClr val="0F172A"/>
-                </a:solidFill>
-                <a:latin typeface="Pretendard" pitchFamily="34" charset="0"/>
-                <a:ea typeface="Pretendard" pitchFamily="34" charset="-122"/>
-                <a:cs typeface="Pretendard" pitchFamily="34" charset="-120"/>
-              </a:rPr>
-              <a:t>본 자산은 우수한 입지 경쟁력과 견고한 펀더멘털을 바탕으로 안정적인 현금흐름 창출과 중장기 자산 가치 상승을 동시에 실현할 수 있는 우량 투자 기회입니다.</a:t>
-            </a:r>
-            <a:endParaRPr lang="en-US" sz="930" dirty="0"/>
-          </a:p>
-        </p:txBody>
-      </p:sp>
-      <p:sp>
-        <p:nvSpPr>
-          <p:cNvPr id="17" name="Text 15"/>
+          <p:cNvPr id="13" name="Text 11"/>
           <p:cNvSpPr/>
           <p:nvPr/>
         </p:nvSpPr>
@@ -7842,7 +7719,7 @@
       </p:sp>
       <p:sp>
         <p:nvSpPr>
-          <p:cNvPr id="18" name="Shape 16"/>
+          <p:cNvPr id="14" name="Shape 12"/>
           <p:cNvSpPr/>
           <p:nvPr/>
         </p:nvSpPr>
@@ -9736,7 +9613,7 @@
                 <a:ea typeface="Pretendard" pitchFamily="34" charset="-122"/>
                 <a:cs typeface="Pretendard" pitchFamily="34" charset="-120"/>
               </a:rPr>
-              <a:t>본 자산은 우수한 권역 입지 경쟁력과 견고한 펀더멘털을 기반으로 중장기 자산 가치 상승 및 안정적인 현금흐름을 동시에 실현할 수 있는 전략적 투자 기회입니다.</a:t>
+              <a:t>본 자산에 대한 상세 분석 및 투자 의사결정은 원본 임대차 계약서 및 공부상 권리관계 실사를 바탕으로 진행됩니다.</a:t>
             </a:r>
             <a:endParaRPr lang="en-US" sz="1100" dirty="0"/>
           </a:p>
@@ -9988,7 +9865,7 @@
         <p:spPr>
           <a:xfrm>
             <a:off x="786384" y="1792224"/>
-            <a:ext cx="384048" cy="384048"/>
+            <a:ext cx="438912" cy="438912"/>
           </a:xfrm>
           <a:prstGeom prst="ellipse">
             <a:avLst/>
@@ -10008,7 +9885,7 @@
         <p:spPr>
           <a:xfrm>
             <a:off x="786384" y="1792224"/>
-            <a:ext cx="384048" cy="384048"/>
+            <a:ext cx="438912" cy="438912"/>
           </a:xfrm>
           <a:prstGeom prst="rect">
             <a:avLst/>
@@ -10024,7 +9901,7 @@
               <a:buNone/>
             </a:pPr>
             <a:r>
-              <a:rPr lang="en-US" sz="1300" b="1" dirty="0">
+              <a:rPr lang="en-US" sz="1400" b="1" dirty="0">
                 <a:solidFill>
                   <a:srgbClr val="FFFFFF"/>
                 </a:solidFill>
@@ -10032,9 +9909,9 @@
                 <a:ea typeface="Arial" pitchFamily="34" charset="-122"/>
                 <a:cs typeface="Arial" pitchFamily="34" charset="-120"/>
               </a:rPr>
-              <a:t>STEP 1</a:t>
-            </a:r>
-            <a:endParaRPr lang="en-US" sz="1300" dirty="0"/>
+              <a:t>01</a:t>
+            </a:r>
+            <a:endParaRPr lang="en-US" sz="1400" dirty="0"/>
           </a:p>
         </p:txBody>
       </p:sp>
@@ -10195,7 +10072,7 @@
         <p:spPr>
           <a:xfrm>
             <a:off x="4594250" y="1792224"/>
-            <a:ext cx="384048" cy="384048"/>
+            <a:ext cx="438912" cy="438912"/>
           </a:xfrm>
           <a:prstGeom prst="ellipse">
             <a:avLst/>
@@ -10215,7 +10092,7 @@
         <p:spPr>
           <a:xfrm>
             <a:off x="4594250" y="1792224"/>
-            <a:ext cx="384048" cy="384048"/>
+            <a:ext cx="438912" cy="438912"/>
           </a:xfrm>
           <a:prstGeom prst="rect">
             <a:avLst/>
@@ -10231,7 +10108,7 @@
               <a:buNone/>
             </a:pPr>
             <a:r>
-              <a:rPr lang="en-US" sz="1300" b="1" dirty="0">
+              <a:rPr lang="en-US" sz="1400" b="1" dirty="0">
                 <a:solidFill>
                   <a:srgbClr val="FFFFFF"/>
                 </a:solidFill>
@@ -10239,9 +10116,9 @@
                 <a:ea typeface="Arial" pitchFamily="34" charset="-122"/>
                 <a:cs typeface="Arial" pitchFamily="34" charset="-120"/>
               </a:rPr>
-              <a:t>STEP 2</a:t>
-            </a:r>
-            <a:endParaRPr lang="en-US" sz="1300" dirty="0"/>
+              <a:t>02</a:t>
+            </a:r>
+            <a:endParaRPr lang="en-US" sz="1400" dirty="0"/>
           </a:p>
         </p:txBody>
       </p:sp>
@@ -10402,7 +10279,7 @@
         <p:spPr>
           <a:xfrm>
             <a:off x="8402117" y="1792224"/>
-            <a:ext cx="384048" cy="384048"/>
+            <a:ext cx="438912" cy="438912"/>
           </a:xfrm>
           <a:prstGeom prst="ellipse">
             <a:avLst/>
@@ -10422,7 +10299,7 @@
         <p:spPr>
           <a:xfrm>
             <a:off x="8402117" y="1792224"/>
-            <a:ext cx="384048" cy="384048"/>
+            <a:ext cx="438912" cy="438912"/>
           </a:xfrm>
           <a:prstGeom prst="rect">
             <a:avLst/>
@@ -10438,7 +10315,7 @@
               <a:buNone/>
             </a:pPr>
             <a:r>
-              <a:rPr lang="en-US" sz="1300" b="1" dirty="0">
+              <a:rPr lang="en-US" sz="1400" b="1" dirty="0">
                 <a:solidFill>
                   <a:srgbClr val="FFFFFF"/>
                 </a:solidFill>
@@ -10446,9 +10323,9 @@
                 <a:ea typeface="Arial" pitchFamily="34" charset="-122"/>
                 <a:cs typeface="Arial" pitchFamily="34" charset="-120"/>
               </a:rPr>
-              <a:t>STEP 3</a:t>
-            </a:r>
-            <a:endParaRPr lang="en-US" sz="1300" dirty="0"/>
+              <a:t>03</a:t>
+            </a:r>
+            <a:endParaRPr lang="en-US" sz="1400" dirty="0"/>
           </a:p>
         </p:txBody>
       </p:sp>
